--- a/docs/QUAD_User_Journey.pptx
+++ b/docs/QUAD_User_Journey.pptx
@@ -3281,7 +3281,7 @@
               </a:defRPr>
             </a:pPr>
             <a:r>
-              <a:t>April 2026</a:t>
+              <a:t>May 2026</a:t>
             </a:r>
           </a:p>
         </p:txBody>
@@ -3599,7 +3599,26 @@
               </a:defRPr>
             </a:pPr>
             <a:r>
-              <a:t>Fleet management for IoT/edge deployment</a:t>
+              <a:t>IoT fleet rollout: QCS6490 / QCS8550 / RB3 Gen 2 / RB5 — see docs/IOT_DEPENDENCIES.xlsx</a:t>
+            </a:r>
+          </a:p>
+          <a:p>
+            <a:pPr>
+              <a:spcBef>
+                <a:spcPts val="1000"/>
+              </a:spcBef>
+              <a:spcAft>
+                <a:spcPts val="400"/>
+              </a:spcAft>
+              <a:defRPr sz="1800">
+                <a:solidFill>
+                  <a:srgbClr val="2D2D2D"/>
+                </a:solidFill>
+                <a:latin typeface="Calibri"/>
+              </a:defRPr>
+            </a:pPr>
+            <a:r>
+              <a:t>OTA via Mender / RAUC; MQTT + CoAP + LwM2M telemetry to AWS / Azure IoT</a:t>
             </a:r>
           </a:p>
         </p:txBody>
@@ -5256,7 +5275,7 @@
               </a:defRPr>
             </a:pPr>
             <a:r>
-              <a:t>"The CUDA of Qualcomm — one platform for all Qualcomm silicon"</a:t>
+              <a:t>"One platform for all Qualcomm silicon"</a:t>
             </a:r>
           </a:p>
           <a:p>
@@ -5531,7 +5550,7 @@
               </a:defRPr>
             </a:pPr>
             <a:r>
-              <a:t>Result: 933 tests pass, Claude Code auto-detects MCP server</a:t>
+              <a:t>Result: 2002 tests pass, Claude Code auto-detects MCP server</a:t>
             </a:r>
           </a:p>
           <a:p>
@@ -5681,7 +5700,7 @@
               </a:defRPr>
             </a:pPr>
             <a:r>
-              <a:t>✓ 933 tests passed</a:t>
+              <a:t>✓ 2002 tests passed</a:t>
             </a:r>
           </a:p>
         </p:txBody>
@@ -7185,7 +7204,7 @@
               </a:defRPr>
             </a:pPr>
             <a:r>
-              <a:t>Supports: Windows (local), Linux (SSH), Android (ADB)</a:t>
+              <a:t>Supports: Windows (local), Linux (SSH), Android (ADB), Qualcomm IoT (RB3 Gen 2 / RB5)</a:t>
             </a:r>
           </a:p>
         </p:txBody>

--- a/docs/QUAD_User_Journey.pptx
+++ b/docs/QUAD_User_Journey.pptx
@@ -6836,7 +6836,7 @@
               </a:defRPr>
             </a:pPr>
             <a:r>
-              <a:t>"Profile power consumption on NPU vs GPU"</a:t>
+              <a:t>"Profile power on NPU vs GPU — use QPM3 when available"</a:t>
             </a:r>
           </a:p>
           <a:p>
@@ -6855,7 +6855,7 @@
               </a:defRPr>
             </a:pPr>
             <a:r>
-              <a:t>"Generate an Android AAR for this model"</a:t>
+              <a:t>"List models, fetch the latest mobilenetv2 from the registry"</a:t>
             </a:r>
           </a:p>
           <a:p>
@@ -6875,6 +6875,25 @@
             </a:pPr>
             <a:r>
               <a:t>5 MCP tools auto-registered — zero config in Claude Code</a:t>
+            </a:r>
+          </a:p>
+          <a:p>
+            <a:pPr>
+              <a:spcBef>
+                <a:spcPts val="1000"/>
+              </a:spcBef>
+              <a:spcAft>
+                <a:spcPts val="400"/>
+              </a:spcAft>
+              <a:defRPr sz="1800">
+                <a:solidFill>
+                  <a:srgbClr val="2D2D2D"/>
+                </a:solidFill>
+                <a:latin typeface="Calibri"/>
+              </a:defRPr>
+            </a:pPr>
+            <a:r>
+              <a:t>Every returned metric carries a provenance tag (measured/estimated/not_measured)</a:t>
             </a:r>
           </a:p>
         </p:txBody>
